--- a/docs/presentations/CTO-Deck-RuvNet-2026.pptx
+++ b/docs/presentations/CTO-Deck-RuvNet-2026.pptx
@@ -2536,16 +2536,42 @@
           </a:p>
         </p:txBody>
       </p:sp>
-      <p:sp>
-        <p:nvSpPr>
-          <p:cNvPr id="4" name="Text 2"/>
+      <p:pic>
+        <p:nvPicPr>
+          <p:cNvPr id="4" name="Image 0" descr="/Users/stuartkerr/Code/Ask-Ruvnet/Ask-Ruvnet/docs/presentations/images/01-architecture-overview.png">    </p:cNvPr>
+          <p:cNvPicPr>
+            <a:picLocks noChangeAspect="1"/>
+          </p:cNvPicPr>
+          <p:nvPr/>
+        </p:nvPicPr>
+        <p:blipFill>
+          <a:blip r:embed="rId1">
+            <a:alphaModFix amt="45000"/>
+          </a:blip>
+          <a:stretch>
+            <a:fillRect/>
+          </a:stretch>
+        </p:blipFill>
+        <p:spPr>
+          <a:xfrm>
+            <a:off x="6217920" y="1097280"/>
+            <a:ext cx="2743200" cy="1828800"/>
+          </a:xfrm>
+          <a:prstGeom prst="rect">
+            <a:avLst/>
+          </a:prstGeom>
+        </p:spPr>
+      </p:pic>
+      <p:sp>
+        <p:nvSpPr>
+          <p:cNvPr id="5" name="Text 2"/>
           <p:cNvSpPr/>
           <p:nvPr/>
         </p:nvSpPr>
         <p:spPr>
           <a:xfrm>
             <a:off x="731520" y="1371600"/>
-            <a:ext cx="7680960" cy="1280160"/>
+            <a:ext cx="5029200" cy="1280160"/>
           </a:xfrm>
           <a:prstGeom prst="rect">
             <a:avLst/>
@@ -2594,14 +2620,14 @@
       </p:sp>
       <p:sp>
         <p:nvSpPr>
-          <p:cNvPr id="5" name="Text 3"/>
+          <p:cNvPr id="6" name="Text 3"/>
           <p:cNvSpPr/>
           <p:nvPr/>
         </p:nvSpPr>
         <p:spPr>
           <a:xfrm>
             <a:off x="731520" y="2743200"/>
-            <a:ext cx="6400800" cy="457200"/>
+            <a:ext cx="5029200" cy="457200"/>
           </a:xfrm>
           <a:prstGeom prst="rect">
             <a:avLst/>
@@ -2633,7 +2659,7 @@
       </p:sp>
       <p:sp>
         <p:nvSpPr>
-          <p:cNvPr id="6" name="Text 4"/>
+          <p:cNvPr id="7" name="Text 4"/>
           <p:cNvSpPr/>
           <p:nvPr/>
         </p:nvSpPr>
@@ -2672,7 +2698,7 @@
       </p:sp>
       <p:sp>
         <p:nvSpPr>
-          <p:cNvPr id="7" name="Text 5"/>
+          <p:cNvPr id="8" name="Text 5"/>
           <p:cNvSpPr/>
           <p:nvPr/>
         </p:nvSpPr>
@@ -2711,7 +2737,7 @@
       </p:sp>
       <p:sp>
         <p:nvSpPr>
-          <p:cNvPr id="8" name="Text 6"/>
+          <p:cNvPr id="9" name="Text 6"/>
           <p:cNvSpPr/>
           <p:nvPr/>
         </p:nvSpPr>
@@ -2750,7 +2776,7 @@
       </p:sp>
       <p:sp>
         <p:nvSpPr>
-          <p:cNvPr id="9" name="Text 7"/>
+          <p:cNvPr id="10" name="Text 7"/>
           <p:cNvSpPr/>
           <p:nvPr/>
         </p:nvSpPr>
@@ -2789,7 +2815,7 @@
       </p:sp>
       <p:sp>
         <p:nvSpPr>
-          <p:cNvPr id="10" name="Text 8"/>
+          <p:cNvPr id="11" name="Text 8"/>
           <p:cNvSpPr/>
           <p:nvPr/>
         </p:nvSpPr>
@@ -2828,7 +2854,7 @@
       </p:sp>
       <p:sp>
         <p:nvSpPr>
-          <p:cNvPr id="11" name="Text 9"/>
+          <p:cNvPr id="12" name="Text 9"/>
           <p:cNvSpPr/>
           <p:nvPr/>
         </p:nvSpPr>
@@ -2867,7 +2893,7 @@
       </p:sp>
       <p:sp>
         <p:nvSpPr>
-          <p:cNvPr id="12" name="Text 10"/>
+          <p:cNvPr id="13" name="Text 10"/>
           <p:cNvSpPr/>
           <p:nvPr/>
         </p:nvSpPr>
@@ -2906,7 +2932,7 @@
       </p:sp>
       <p:sp>
         <p:nvSpPr>
-          <p:cNvPr id="13" name="Text 11"/>
+          <p:cNvPr id="14" name="Text 11"/>
           <p:cNvSpPr/>
           <p:nvPr/>
         </p:nvSpPr>
@@ -2945,7 +2971,7 @@
       </p:sp>
       <p:sp>
         <p:nvSpPr>
-          <p:cNvPr id="14" name="Text 12"/>
+          <p:cNvPr id="15" name="Text 12"/>
           <p:cNvSpPr/>
           <p:nvPr/>
         </p:nvSpPr>
@@ -5569,9 +5595,35 @@
           <a:ln/>
         </p:spPr>
       </p:sp>
-      <p:sp>
-        <p:nvSpPr>
-          <p:cNvPr id="3" name="Text 1"/>
+      <p:pic>
+        <p:nvPicPr>
+          <p:cNvPr id="3" name="Image 0" descr="/Users/stuartkerr/Code/Ask-Ruvnet/Ask-Ruvnet/docs/presentations/images/04-code-terminal.png">    </p:cNvPr>
+          <p:cNvPicPr>
+            <a:picLocks noChangeAspect="1"/>
+          </p:cNvPicPr>
+          <p:nvPr/>
+        </p:nvPicPr>
+        <p:blipFill>
+          <a:blip r:embed="rId1">
+            <a:alphaModFix amt="8000"/>
+          </a:blip>
+          <a:stretch>
+            <a:fillRect/>
+          </a:stretch>
+        </p:blipFill>
+        <p:spPr>
+          <a:xfrm>
+            <a:off x="0" y="0"/>
+            <a:ext cx="9144000" cy="5143500"/>
+          </a:xfrm>
+          <a:prstGeom prst="rect">
+            <a:avLst/>
+          </a:prstGeom>
+        </p:spPr>
+      </p:pic>
+      <p:sp>
+        <p:nvSpPr>
+          <p:cNvPr id="4" name="Text 1"/>
           <p:cNvSpPr/>
           <p:nvPr/>
         </p:nvSpPr>
@@ -5610,7 +5662,7 @@
       </p:sp>
       <p:sp>
         <p:nvSpPr>
-          <p:cNvPr id="4" name="Text 2"/>
+          <p:cNvPr id="5" name="Text 2"/>
           <p:cNvSpPr/>
           <p:nvPr/>
         </p:nvSpPr>
@@ -5649,7 +5701,7 @@
       </p:sp>
       <p:sp>
         <p:nvSpPr>
-          <p:cNvPr id="5" name="Shape 3"/>
+          <p:cNvPr id="6" name="Shape 3"/>
           <p:cNvSpPr/>
           <p:nvPr/>
         </p:nvSpPr>
@@ -5676,7 +5728,7 @@
       </p:sp>
       <p:sp>
         <p:nvSpPr>
-          <p:cNvPr id="6" name="Shape 4"/>
+          <p:cNvPr id="7" name="Shape 4"/>
           <p:cNvSpPr/>
           <p:nvPr/>
         </p:nvSpPr>
@@ -5696,7 +5748,7 @@
       </p:sp>
       <p:sp>
         <p:nvSpPr>
-          <p:cNvPr id="7" name="Text 5"/>
+          <p:cNvPr id="8" name="Text 5"/>
           <p:cNvSpPr/>
           <p:nvPr/>
         </p:nvSpPr>
@@ -5805,7 +5857,7 @@
       </p:sp>
       <p:sp>
         <p:nvSpPr>
-          <p:cNvPr id="8" name="Text 6"/>
+          <p:cNvPr id="9" name="Text 6"/>
           <p:cNvSpPr/>
           <p:nvPr/>
         </p:nvSpPr>
@@ -5844,7 +5896,7 @@
       </p:sp>
       <p:sp>
         <p:nvSpPr>
-          <p:cNvPr id="9" name="Text 7"/>
+          <p:cNvPr id="10" name="Text 7"/>
           <p:cNvSpPr/>
           <p:nvPr/>
         </p:nvSpPr>
@@ -5967,7 +6019,7 @@
       </p:sp>
       <p:sp>
         <p:nvSpPr>
-          <p:cNvPr id="10" name="Text 8"/>
+          <p:cNvPr id="11" name="Text 8"/>
           <p:cNvSpPr/>
           <p:nvPr/>
         </p:nvSpPr>
@@ -6076,7 +6128,7 @@
       </p:sp>
       <p:sp>
         <p:nvSpPr>
-          <p:cNvPr id="11" name="Text 9"/>
+          <p:cNvPr id="12" name="Text 9"/>
           <p:cNvSpPr/>
           <p:nvPr/>
         </p:nvSpPr>
@@ -6115,7 +6167,7 @@
       </p:sp>
       <p:sp>
         <p:nvSpPr>
-          <p:cNvPr id="12" name="Text 10"/>
+          <p:cNvPr id="13" name="Text 10"/>
           <p:cNvSpPr/>
           <p:nvPr/>
         </p:nvSpPr>
@@ -6154,7 +6206,7 @@
       </p:sp>
       <p:sp>
         <p:nvSpPr>
-          <p:cNvPr id="13" name="Text 11"/>
+          <p:cNvPr id="14" name="Text 11"/>
           <p:cNvSpPr/>
           <p:nvPr/>
         </p:nvSpPr>
@@ -6277,7 +6329,7 @@
       </p:sp>
       <p:sp>
         <p:nvSpPr>
-          <p:cNvPr id="14" name="Text 12"/>
+          <p:cNvPr id="15" name="Text 12"/>
           <p:cNvSpPr/>
           <p:nvPr/>
         </p:nvSpPr>
@@ -6400,7 +6452,7 @@
       </p:sp>
       <p:sp>
         <p:nvSpPr>
-          <p:cNvPr id="15" name="Text 13"/>
+          <p:cNvPr id="16" name="Text 13"/>
           <p:cNvSpPr/>
           <p:nvPr/>
         </p:nvSpPr>
@@ -6481,7 +6533,7 @@
       </p:sp>
       <p:sp>
         <p:nvSpPr>
-          <p:cNvPr id="16" name="Text 14"/>
+          <p:cNvPr id="17" name="Text 14"/>
           <p:cNvSpPr/>
           <p:nvPr/>
         </p:nvSpPr>
@@ -6562,7 +6614,7 @@
       </p:sp>
       <p:sp>
         <p:nvSpPr>
-          <p:cNvPr id="17" name="Text 15"/>
+          <p:cNvPr id="18" name="Text 15"/>
           <p:cNvSpPr/>
           <p:nvPr/>
         </p:nvSpPr>
@@ -6643,7 +6695,7 @@
       </p:sp>
       <p:sp>
         <p:nvSpPr>
-          <p:cNvPr id="18" name="Text 16"/>
+          <p:cNvPr id="19" name="Text 16"/>
           <p:cNvSpPr/>
           <p:nvPr/>
         </p:nvSpPr>
@@ -6682,7 +6734,7 @@
       </p:sp>
       <p:sp>
         <p:nvSpPr>
-          <p:cNvPr id="19" name="Text 17"/>
+          <p:cNvPr id="20" name="Text 17"/>
           <p:cNvSpPr/>
           <p:nvPr/>
         </p:nvSpPr>
@@ -6819,7 +6871,7 @@
       </p:sp>
       <p:sp>
         <p:nvSpPr>
-          <p:cNvPr id="20" name="Text 18"/>
+          <p:cNvPr id="21" name="Text 18"/>
           <p:cNvSpPr/>
           <p:nvPr/>
         </p:nvSpPr>
@@ -6858,7 +6910,7 @@
       </p:sp>
       <p:sp>
         <p:nvSpPr>
-          <p:cNvPr id="21" name="Text 19"/>
+          <p:cNvPr id="22" name="Text 19"/>
           <p:cNvSpPr/>
           <p:nvPr/>
         </p:nvSpPr>
@@ -6897,7 +6949,7 @@
       </p:sp>
       <p:sp>
         <p:nvSpPr>
-          <p:cNvPr id="22" name="Text 20"/>
+          <p:cNvPr id="23" name="Text 20"/>
           <p:cNvSpPr/>
           <p:nvPr/>
         </p:nvSpPr>
@@ -6936,7 +6988,7 @@
       </p:sp>
       <p:sp>
         <p:nvSpPr>
-          <p:cNvPr id="23" name="Shape 21"/>
+          <p:cNvPr id="24" name="Shape 21"/>
           <p:cNvSpPr/>
           <p:nvPr/>
         </p:nvSpPr>
@@ -6956,7 +7008,7 @@
       </p:sp>
       <p:sp>
         <p:nvSpPr>
-          <p:cNvPr id="24" name="Text 22"/>
+          <p:cNvPr id="25" name="Text 22"/>
           <p:cNvSpPr/>
           <p:nvPr/>
         </p:nvSpPr>
@@ -8054,9 +8106,35 @@
           <a:ln/>
         </p:spPr>
       </p:sp>
-      <p:sp>
-        <p:nvSpPr>
-          <p:cNvPr id="3" name="Text 1"/>
+      <p:pic>
+        <p:nvPicPr>
+          <p:cNvPr id="3" name="Image 0" descr="/Users/stuartkerr/Code/Ask-Ruvnet/Ask-Ruvnet/docs/presentations/images/03-compounding-advantage.png">    </p:cNvPr>
+          <p:cNvPicPr>
+            <a:picLocks noChangeAspect="1"/>
+          </p:cNvPicPr>
+          <p:nvPr/>
+        </p:nvPicPr>
+        <p:blipFill>
+          <a:blip r:embed="rId1">
+            <a:alphaModFix amt="7000"/>
+          </a:blip>
+          <a:stretch>
+            <a:fillRect/>
+          </a:stretch>
+        </p:blipFill>
+        <p:spPr>
+          <a:xfrm>
+            <a:off x="0" y="0"/>
+            <a:ext cx="9144000" cy="5143500"/>
+          </a:xfrm>
+          <a:prstGeom prst="rect">
+            <a:avLst/>
+          </a:prstGeom>
+        </p:spPr>
+      </p:pic>
+      <p:sp>
+        <p:nvSpPr>
+          <p:cNvPr id="4" name="Text 1"/>
           <p:cNvSpPr/>
           <p:nvPr/>
         </p:nvSpPr>
@@ -8095,7 +8173,7 @@
       </p:sp>
       <p:sp>
         <p:nvSpPr>
-          <p:cNvPr id="4" name="Text 2"/>
+          <p:cNvPr id="5" name="Text 2"/>
           <p:cNvSpPr/>
           <p:nvPr/>
         </p:nvSpPr>
@@ -8134,7 +8212,7 @@
       </p:sp>
       <p:sp>
         <p:nvSpPr>
-          <p:cNvPr id="5" name="Shape 3"/>
+          <p:cNvPr id="6" name="Shape 3"/>
           <p:cNvSpPr/>
           <p:nvPr/>
         </p:nvSpPr>
@@ -8154,7 +8232,7 @@
       </p:sp>
       <p:sp>
         <p:nvSpPr>
-          <p:cNvPr id="6" name="Shape 4"/>
+          <p:cNvPr id="7" name="Shape 4"/>
           <p:cNvSpPr/>
           <p:nvPr/>
         </p:nvSpPr>
@@ -8174,7 +8252,7 @@
       </p:sp>
       <p:sp>
         <p:nvSpPr>
-          <p:cNvPr id="7" name="Shape 5"/>
+          <p:cNvPr id="8" name="Shape 5"/>
           <p:cNvSpPr/>
           <p:nvPr/>
         </p:nvSpPr>
@@ -8194,7 +8272,7 @@
       </p:sp>
       <p:sp>
         <p:nvSpPr>
-          <p:cNvPr id="8" name="Text 6"/>
+          <p:cNvPr id="9" name="Text 6"/>
           <p:cNvSpPr/>
           <p:nvPr/>
         </p:nvSpPr>
@@ -8233,7 +8311,7 @@
       </p:sp>
       <p:sp>
         <p:nvSpPr>
-          <p:cNvPr id="9" name="Text 7"/>
+          <p:cNvPr id="10" name="Text 7"/>
           <p:cNvSpPr/>
           <p:nvPr/>
         </p:nvSpPr>
@@ -8272,7 +8350,7 @@
       </p:sp>
       <p:sp>
         <p:nvSpPr>
-          <p:cNvPr id="10" name="Text 8"/>
+          <p:cNvPr id="11" name="Text 8"/>
           <p:cNvSpPr/>
           <p:nvPr/>
         </p:nvSpPr>
@@ -8311,7 +8389,7 @@
       </p:sp>
       <p:sp>
         <p:nvSpPr>
-          <p:cNvPr id="11" name="Shape 9"/>
+          <p:cNvPr id="12" name="Shape 9"/>
           <p:cNvSpPr/>
           <p:nvPr/>
         </p:nvSpPr>
@@ -8331,7 +8409,7 @@
       </p:sp>
       <p:sp>
         <p:nvSpPr>
-          <p:cNvPr id="12" name="Text 10"/>
+          <p:cNvPr id="13" name="Text 10"/>
           <p:cNvSpPr/>
           <p:nvPr/>
         </p:nvSpPr>
@@ -8370,7 +8448,7 @@
       </p:sp>
       <p:sp>
         <p:nvSpPr>
-          <p:cNvPr id="13" name="Shape 11"/>
+          <p:cNvPr id="14" name="Shape 11"/>
           <p:cNvSpPr/>
           <p:nvPr/>
         </p:nvSpPr>
@@ -8390,7 +8468,7 @@
       </p:sp>
       <p:sp>
         <p:nvSpPr>
-          <p:cNvPr id="14" name="Shape 12"/>
+          <p:cNvPr id="15" name="Shape 12"/>
           <p:cNvSpPr/>
           <p:nvPr/>
         </p:nvSpPr>
@@ -8410,7 +8488,7 @@
       </p:sp>
       <p:sp>
         <p:nvSpPr>
-          <p:cNvPr id="15" name="Shape 13"/>
+          <p:cNvPr id="16" name="Shape 13"/>
           <p:cNvSpPr/>
           <p:nvPr/>
         </p:nvSpPr>
@@ -8430,7 +8508,7 @@
       </p:sp>
       <p:sp>
         <p:nvSpPr>
-          <p:cNvPr id="16" name="Text 14"/>
+          <p:cNvPr id="17" name="Text 14"/>
           <p:cNvSpPr/>
           <p:nvPr/>
         </p:nvSpPr>
@@ -8469,7 +8547,7 @@
       </p:sp>
       <p:sp>
         <p:nvSpPr>
-          <p:cNvPr id="17" name="Text 15"/>
+          <p:cNvPr id="18" name="Text 15"/>
           <p:cNvSpPr/>
           <p:nvPr/>
         </p:nvSpPr>
@@ -8508,7 +8586,7 @@
       </p:sp>
       <p:sp>
         <p:nvSpPr>
-          <p:cNvPr id="18" name="Text 16"/>
+          <p:cNvPr id="19" name="Text 16"/>
           <p:cNvSpPr/>
           <p:nvPr/>
         </p:nvSpPr>
@@ -8547,7 +8625,7 @@
       </p:sp>
       <p:sp>
         <p:nvSpPr>
-          <p:cNvPr id="19" name="Shape 17"/>
+          <p:cNvPr id="20" name="Shape 17"/>
           <p:cNvSpPr/>
           <p:nvPr/>
         </p:nvSpPr>
@@ -8567,7 +8645,7 @@
       </p:sp>
       <p:sp>
         <p:nvSpPr>
-          <p:cNvPr id="20" name="Text 18"/>
+          <p:cNvPr id="21" name="Text 18"/>
           <p:cNvSpPr/>
           <p:nvPr/>
         </p:nvSpPr>
@@ -8606,7 +8684,7 @@
       </p:sp>
       <p:sp>
         <p:nvSpPr>
-          <p:cNvPr id="21" name="Shape 19"/>
+          <p:cNvPr id="22" name="Shape 19"/>
           <p:cNvSpPr/>
           <p:nvPr/>
         </p:nvSpPr>
@@ -8626,7 +8704,7 @@
       </p:sp>
       <p:sp>
         <p:nvSpPr>
-          <p:cNvPr id="22" name="Shape 20"/>
+          <p:cNvPr id="23" name="Shape 20"/>
           <p:cNvSpPr/>
           <p:nvPr/>
         </p:nvSpPr>
@@ -8646,7 +8724,7 @@
       </p:sp>
       <p:sp>
         <p:nvSpPr>
-          <p:cNvPr id="23" name="Shape 21"/>
+          <p:cNvPr id="24" name="Shape 21"/>
           <p:cNvSpPr/>
           <p:nvPr/>
         </p:nvSpPr>
@@ -8666,7 +8744,7 @@
       </p:sp>
       <p:sp>
         <p:nvSpPr>
-          <p:cNvPr id="24" name="Text 22"/>
+          <p:cNvPr id="25" name="Text 22"/>
           <p:cNvSpPr/>
           <p:nvPr/>
         </p:nvSpPr>
@@ -8705,7 +8783,7 @@
       </p:sp>
       <p:sp>
         <p:nvSpPr>
-          <p:cNvPr id="25" name="Text 23"/>
+          <p:cNvPr id="26" name="Text 23"/>
           <p:cNvSpPr/>
           <p:nvPr/>
         </p:nvSpPr>
@@ -8744,7 +8822,7 @@
       </p:sp>
       <p:sp>
         <p:nvSpPr>
-          <p:cNvPr id="26" name="Text 24"/>
+          <p:cNvPr id="27" name="Text 24"/>
           <p:cNvSpPr/>
           <p:nvPr/>
         </p:nvSpPr>
@@ -8783,7 +8861,7 @@
       </p:sp>
       <p:sp>
         <p:nvSpPr>
-          <p:cNvPr id="27" name="Shape 25"/>
+          <p:cNvPr id="28" name="Shape 25"/>
           <p:cNvSpPr/>
           <p:nvPr/>
         </p:nvSpPr>
@@ -8803,7 +8881,7 @@
       </p:sp>
       <p:sp>
         <p:nvSpPr>
-          <p:cNvPr id="28" name="Text 26"/>
+          <p:cNvPr id="29" name="Text 26"/>
           <p:cNvSpPr/>
           <p:nvPr/>
         </p:nvSpPr>
@@ -8842,7 +8920,7 @@
       </p:sp>
       <p:sp>
         <p:nvSpPr>
-          <p:cNvPr id="29" name="Shape 27"/>
+          <p:cNvPr id="30" name="Shape 27"/>
           <p:cNvSpPr/>
           <p:nvPr/>
         </p:nvSpPr>
@@ -8862,7 +8940,7 @@
       </p:sp>
       <p:sp>
         <p:nvSpPr>
-          <p:cNvPr id="30" name="Shape 28"/>
+          <p:cNvPr id="31" name="Shape 28"/>
           <p:cNvSpPr/>
           <p:nvPr/>
         </p:nvSpPr>
@@ -8882,7 +8960,7 @@
       </p:sp>
       <p:sp>
         <p:nvSpPr>
-          <p:cNvPr id="31" name="Shape 29"/>
+          <p:cNvPr id="32" name="Shape 29"/>
           <p:cNvSpPr/>
           <p:nvPr/>
         </p:nvSpPr>
@@ -8902,7 +8980,7 @@
       </p:sp>
       <p:sp>
         <p:nvSpPr>
-          <p:cNvPr id="32" name="Text 30"/>
+          <p:cNvPr id="33" name="Text 30"/>
           <p:cNvSpPr/>
           <p:nvPr/>
         </p:nvSpPr>
@@ -8941,7 +9019,7 @@
       </p:sp>
       <p:sp>
         <p:nvSpPr>
-          <p:cNvPr id="33" name="Text 31"/>
+          <p:cNvPr id="34" name="Text 31"/>
           <p:cNvSpPr/>
           <p:nvPr/>
         </p:nvSpPr>
@@ -8980,7 +9058,7 @@
       </p:sp>
       <p:sp>
         <p:nvSpPr>
-          <p:cNvPr id="34" name="Text 32"/>
+          <p:cNvPr id="35" name="Text 32"/>
           <p:cNvSpPr/>
           <p:nvPr/>
         </p:nvSpPr>
@@ -9019,7 +9097,7 @@
       </p:sp>
       <p:sp>
         <p:nvSpPr>
-          <p:cNvPr id="35" name="Shape 33"/>
+          <p:cNvPr id="36" name="Shape 33"/>
           <p:cNvSpPr/>
           <p:nvPr/>
         </p:nvSpPr>
@@ -9039,7 +9117,7 @@
       </p:sp>
       <p:sp>
         <p:nvSpPr>
-          <p:cNvPr id="36" name="Shape 34"/>
+          <p:cNvPr id="37" name="Shape 34"/>
           <p:cNvSpPr/>
           <p:nvPr/>
         </p:nvSpPr>
@@ -9059,7 +9137,7 @@
       </p:sp>
       <p:sp>
         <p:nvSpPr>
-          <p:cNvPr id="37" name="Text 35"/>
+          <p:cNvPr id="38" name="Text 35"/>
           <p:cNvSpPr/>
           <p:nvPr/>
         </p:nvSpPr>
@@ -9098,7 +9176,7 @@
       </p:sp>
       <p:sp>
         <p:nvSpPr>
-          <p:cNvPr id="38" name="Text 36"/>
+          <p:cNvPr id="39" name="Text 36"/>
           <p:cNvSpPr/>
           <p:nvPr/>
         </p:nvSpPr>
@@ -9137,7 +9215,7 @@
       </p:sp>
       <p:sp>
         <p:nvSpPr>
-          <p:cNvPr id="39" name="Text 37"/>
+          <p:cNvPr id="40" name="Text 37"/>
           <p:cNvSpPr/>
           <p:nvPr/>
         </p:nvSpPr>
@@ -9176,7 +9254,7 @@
       </p:sp>
       <p:sp>
         <p:nvSpPr>
-          <p:cNvPr id="40" name="Shape 38"/>
+          <p:cNvPr id="41" name="Shape 38"/>
           <p:cNvSpPr/>
           <p:nvPr/>
         </p:nvSpPr>
@@ -9196,7 +9274,7 @@
       </p:sp>
       <p:sp>
         <p:nvSpPr>
-          <p:cNvPr id="41" name="Text 39"/>
+          <p:cNvPr id="42" name="Text 39"/>
           <p:cNvSpPr/>
           <p:nvPr/>
         </p:nvSpPr>
@@ -10333,9 +10411,35 @@
           <a:ln/>
         </p:spPr>
       </p:sp>
-      <p:sp>
-        <p:nvSpPr>
-          <p:cNvPr id="3" name="Text 1"/>
+      <p:pic>
+        <p:nvPicPr>
+          <p:cNvPr id="3" name="Image 0" descr="/Users/stuartkerr/Code/Ask-Ruvnet/Ask-Ruvnet/docs/presentations/images/video-thumb-How_Ruflo_Actually_Works-mid.jpg">    </p:cNvPr>
+          <p:cNvPicPr>
+            <a:picLocks noChangeAspect="1"/>
+          </p:cNvPicPr>
+          <p:nvPr/>
+        </p:nvPicPr>
+        <p:blipFill>
+          <a:blip r:embed="rId1">
+            <a:alphaModFix amt="25000"/>
+          </a:blip>
+          <a:stretch>
+            <a:fillRect/>
+          </a:stretch>
+        </p:blipFill>
+        <p:spPr>
+          <a:xfrm>
+            <a:off x="5486400" y="182880"/>
+            <a:ext cx="3200400" cy="1828800"/>
+          </a:xfrm>
+          <a:prstGeom prst="rect">
+            <a:avLst/>
+          </a:prstGeom>
+        </p:spPr>
+      </p:pic>
+      <p:sp>
+        <p:nvSpPr>
+          <p:cNvPr id="4" name="Text 1"/>
           <p:cNvSpPr/>
           <p:nvPr/>
         </p:nvSpPr>
@@ -10374,7 +10478,7 @@
       </p:sp>
       <p:sp>
         <p:nvSpPr>
-          <p:cNvPr id="4" name="Text 2"/>
+          <p:cNvPr id="5" name="Text 2"/>
           <p:cNvSpPr/>
           <p:nvPr/>
         </p:nvSpPr>
@@ -13185,7 +13289,7 @@
       </p:graphicFrame>
       <p:sp>
         <p:nvSpPr>
-          <p:cNvPr id="6" name="Text 3"/>
+          <p:cNvPr id="7" name="Text 3"/>
           <p:cNvSpPr/>
           <p:nvPr/>
         </p:nvSpPr>
@@ -13224,7 +13328,7 @@
       </p:sp>
       <p:sp>
         <p:nvSpPr>
-          <p:cNvPr id="7" name="Text 4"/>
+          <p:cNvPr id="8" name="Text 4"/>
           <p:cNvSpPr/>
           <p:nvPr/>
         </p:nvSpPr>
@@ -13263,7 +13367,7 @@
       </p:sp>
       <p:sp>
         <p:nvSpPr>
-          <p:cNvPr id="8" name="Text 5"/>
+          <p:cNvPr id="9" name="Text 5"/>
           <p:cNvSpPr/>
           <p:nvPr/>
         </p:nvSpPr>
@@ -13302,7 +13406,7 @@
       </p:sp>
       <p:sp>
         <p:nvSpPr>
-          <p:cNvPr id="9" name="Text 6"/>
+          <p:cNvPr id="10" name="Text 6"/>
           <p:cNvSpPr/>
           <p:nvPr/>
         </p:nvSpPr>
@@ -13341,7 +13445,7 @@
       </p:sp>
       <p:sp>
         <p:nvSpPr>
-          <p:cNvPr id="10" name="Text 7"/>
+          <p:cNvPr id="11" name="Text 7"/>
           <p:cNvSpPr/>
           <p:nvPr/>
         </p:nvSpPr>
@@ -13380,7 +13484,7 @@
       </p:sp>
       <p:sp>
         <p:nvSpPr>
-          <p:cNvPr id="11" name="Text 8"/>
+          <p:cNvPr id="12" name="Text 8"/>
           <p:cNvSpPr/>
           <p:nvPr/>
         </p:nvSpPr>
@@ -13419,7 +13523,7 @@
       </p:sp>
       <p:sp>
         <p:nvSpPr>
-          <p:cNvPr id="12" name="Text 9"/>
+          <p:cNvPr id="13" name="Text 9"/>
           <p:cNvSpPr/>
           <p:nvPr/>
         </p:nvSpPr>
@@ -13458,7 +13562,7 @@
       </p:sp>
       <p:sp>
         <p:nvSpPr>
-          <p:cNvPr id="13" name="Text 10"/>
+          <p:cNvPr id="14" name="Text 10"/>
           <p:cNvSpPr/>
           <p:nvPr/>
         </p:nvSpPr>
@@ -22222,9 +22326,35 @@
           </a:p>
         </p:txBody>
       </p:sp>
-      <p:sp>
-        <p:nvSpPr>
-          <p:cNvPr id="5" name="Shape 3"/>
+      <p:pic>
+        <p:nvPicPr>
+          <p:cNvPr id="5" name="Image 0" descr="/Users/stuartkerr/Code/Ask-Ruvnet/Ask-Ruvnet/docs/presentations/images/01-architecture-overview.png">    </p:cNvPr>
+          <p:cNvPicPr>
+            <a:picLocks noChangeAspect="1"/>
+          </p:cNvPicPr>
+          <p:nvPr/>
+        </p:nvPicPr>
+        <p:blipFill>
+          <a:blip r:embed="rId1">
+            <a:alphaModFix amt="10000"/>
+          </a:blip>
+          <a:stretch>
+            <a:fillRect/>
+          </a:stretch>
+        </p:blipFill>
+        <p:spPr>
+          <a:xfrm>
+            <a:off x="914400" y="914400"/>
+            <a:ext cx="7315200" cy="3657600"/>
+          </a:xfrm>
+          <a:prstGeom prst="rect">
+            <a:avLst/>
+          </a:prstGeom>
+        </p:spPr>
+      </p:pic>
+      <p:sp>
+        <p:nvSpPr>
+          <p:cNvPr id="6" name="Shape 3"/>
           <p:cNvSpPr/>
           <p:nvPr/>
         </p:nvSpPr>
@@ -22251,7 +22381,7 @@
       </p:sp>
       <p:sp>
         <p:nvSpPr>
-          <p:cNvPr id="6" name="Shape 4"/>
+          <p:cNvPr id="7" name="Shape 4"/>
           <p:cNvSpPr/>
           <p:nvPr/>
         </p:nvSpPr>
@@ -22271,7 +22401,7 @@
       </p:sp>
       <p:sp>
         <p:nvSpPr>
-          <p:cNvPr id="7" name="Text 5"/>
+          <p:cNvPr id="8" name="Text 5"/>
           <p:cNvSpPr/>
           <p:nvPr/>
         </p:nvSpPr>
@@ -22310,7 +22440,7 @@
       </p:sp>
       <p:sp>
         <p:nvSpPr>
-          <p:cNvPr id="8" name="Text 6"/>
+          <p:cNvPr id="9" name="Text 6"/>
           <p:cNvSpPr/>
           <p:nvPr/>
         </p:nvSpPr>
@@ -22349,7 +22479,7 @@
       </p:sp>
       <p:sp>
         <p:nvSpPr>
-          <p:cNvPr id="9" name="Shape 7"/>
+          <p:cNvPr id="10" name="Shape 7"/>
           <p:cNvSpPr/>
           <p:nvPr/>
         </p:nvSpPr>
@@ -22376,7 +22506,7 @@
       </p:sp>
       <p:sp>
         <p:nvSpPr>
-          <p:cNvPr id="10" name="Shape 8"/>
+          <p:cNvPr id="11" name="Shape 8"/>
           <p:cNvSpPr/>
           <p:nvPr/>
         </p:nvSpPr>
@@ -22396,7 +22526,7 @@
       </p:sp>
       <p:sp>
         <p:nvSpPr>
-          <p:cNvPr id="11" name="Text 9"/>
+          <p:cNvPr id="12" name="Text 9"/>
           <p:cNvSpPr/>
           <p:nvPr/>
         </p:nvSpPr>
@@ -22435,7 +22565,7 @@
       </p:sp>
       <p:sp>
         <p:nvSpPr>
-          <p:cNvPr id="12" name="Text 10"/>
+          <p:cNvPr id="13" name="Text 10"/>
           <p:cNvSpPr/>
           <p:nvPr/>
         </p:nvSpPr>
@@ -22474,7 +22604,7 @@
       </p:sp>
       <p:sp>
         <p:nvSpPr>
-          <p:cNvPr id="13" name="Text 11"/>
+          <p:cNvPr id="14" name="Text 11"/>
           <p:cNvSpPr/>
           <p:nvPr/>
         </p:nvSpPr>
@@ -22513,7 +22643,7 @@
       </p:sp>
       <p:sp>
         <p:nvSpPr>
-          <p:cNvPr id="14" name="Shape 12"/>
+          <p:cNvPr id="15" name="Shape 12"/>
           <p:cNvSpPr/>
           <p:nvPr/>
         </p:nvSpPr>
@@ -22540,7 +22670,7 @@
       </p:sp>
       <p:sp>
         <p:nvSpPr>
-          <p:cNvPr id="15" name="Shape 13"/>
+          <p:cNvPr id="16" name="Shape 13"/>
           <p:cNvSpPr/>
           <p:nvPr/>
         </p:nvSpPr>
@@ -22560,7 +22690,7 @@
       </p:sp>
       <p:sp>
         <p:nvSpPr>
-          <p:cNvPr id="16" name="Text 14"/>
+          <p:cNvPr id="17" name="Text 14"/>
           <p:cNvSpPr/>
           <p:nvPr/>
         </p:nvSpPr>
@@ -22599,7 +22729,7 @@
       </p:sp>
       <p:sp>
         <p:nvSpPr>
-          <p:cNvPr id="17" name="Text 15"/>
+          <p:cNvPr id="18" name="Text 15"/>
           <p:cNvSpPr/>
           <p:nvPr/>
         </p:nvSpPr>
@@ -22655,7 +22785,7 @@
       </p:sp>
       <p:sp>
         <p:nvSpPr>
-          <p:cNvPr id="18" name="Text 16"/>
+          <p:cNvPr id="19" name="Text 16"/>
           <p:cNvSpPr/>
           <p:nvPr/>
         </p:nvSpPr>
@@ -22694,7 +22824,7 @@
       </p:sp>
       <p:sp>
         <p:nvSpPr>
-          <p:cNvPr id="19" name="Shape 17"/>
+          <p:cNvPr id="20" name="Shape 17"/>
           <p:cNvSpPr/>
           <p:nvPr/>
         </p:nvSpPr>
@@ -22721,7 +22851,7 @@
       </p:sp>
       <p:sp>
         <p:nvSpPr>
-          <p:cNvPr id="20" name="Shape 18"/>
+          <p:cNvPr id="21" name="Shape 18"/>
           <p:cNvSpPr/>
           <p:nvPr/>
         </p:nvSpPr>
@@ -22741,7 +22871,7 @@
       </p:sp>
       <p:sp>
         <p:nvSpPr>
-          <p:cNvPr id="21" name="Text 19"/>
+          <p:cNvPr id="22" name="Text 19"/>
           <p:cNvSpPr/>
           <p:nvPr/>
         </p:nvSpPr>
@@ -22780,7 +22910,7 @@
       </p:sp>
       <p:sp>
         <p:nvSpPr>
-          <p:cNvPr id="22" name="Text 20"/>
+          <p:cNvPr id="23" name="Text 20"/>
           <p:cNvSpPr/>
           <p:nvPr/>
         </p:nvSpPr>
@@ -22819,7 +22949,7 @@
       </p:sp>
       <p:sp>
         <p:nvSpPr>
-          <p:cNvPr id="23" name="Text 21"/>
+          <p:cNvPr id="24" name="Text 21"/>
           <p:cNvSpPr/>
           <p:nvPr/>
         </p:nvSpPr>
@@ -22858,7 +22988,7 @@
       </p:sp>
       <p:sp>
         <p:nvSpPr>
-          <p:cNvPr id="24" name="Shape 22"/>
+          <p:cNvPr id="25" name="Shape 22"/>
           <p:cNvSpPr/>
           <p:nvPr/>
         </p:nvSpPr>
@@ -22885,7 +23015,7 @@
       </p:sp>
       <p:sp>
         <p:nvSpPr>
-          <p:cNvPr id="25" name="Shape 23"/>
+          <p:cNvPr id="26" name="Shape 23"/>
           <p:cNvSpPr/>
           <p:nvPr/>
         </p:nvSpPr>
@@ -22905,7 +23035,7 @@
       </p:sp>
       <p:sp>
         <p:nvSpPr>
-          <p:cNvPr id="26" name="Text 24"/>
+          <p:cNvPr id="27" name="Text 24"/>
           <p:cNvSpPr/>
           <p:nvPr/>
         </p:nvSpPr>
@@ -22944,7 +23074,7 @@
       </p:sp>
       <p:sp>
         <p:nvSpPr>
-          <p:cNvPr id="27" name="Text 25"/>
+          <p:cNvPr id="28" name="Text 25"/>
           <p:cNvSpPr/>
           <p:nvPr/>
         </p:nvSpPr>
@@ -22983,7 +23113,7 @@
       </p:sp>
       <p:sp>
         <p:nvSpPr>
-          <p:cNvPr id="28" name="Text 26"/>
+          <p:cNvPr id="29" name="Text 26"/>
           <p:cNvSpPr/>
           <p:nvPr/>
         </p:nvSpPr>
@@ -23022,7 +23152,7 @@
       </p:sp>
       <p:sp>
         <p:nvSpPr>
-          <p:cNvPr id="29" name="Shape 27"/>
+          <p:cNvPr id="30" name="Shape 27"/>
           <p:cNvSpPr/>
           <p:nvPr/>
         </p:nvSpPr>
@@ -23049,7 +23179,7 @@
       </p:sp>
       <p:sp>
         <p:nvSpPr>
-          <p:cNvPr id="30" name="Shape 28"/>
+          <p:cNvPr id="31" name="Shape 28"/>
           <p:cNvSpPr/>
           <p:nvPr/>
         </p:nvSpPr>
@@ -23069,7 +23199,7 @@
       </p:sp>
       <p:sp>
         <p:nvSpPr>
-          <p:cNvPr id="31" name="Text 29"/>
+          <p:cNvPr id="32" name="Text 29"/>
           <p:cNvSpPr/>
           <p:nvPr/>
         </p:nvSpPr>
@@ -23108,7 +23238,7 @@
       </p:sp>
       <p:sp>
         <p:nvSpPr>
-          <p:cNvPr id="32" name="Text 30"/>
+          <p:cNvPr id="33" name="Text 30"/>
           <p:cNvSpPr/>
           <p:nvPr/>
         </p:nvSpPr>
@@ -23147,7 +23277,7 @@
       </p:sp>
       <p:sp>
         <p:nvSpPr>
-          <p:cNvPr id="33" name="Text 31"/>
+          <p:cNvPr id="34" name="Text 31"/>
           <p:cNvSpPr/>
           <p:nvPr/>
         </p:nvSpPr>
@@ -23186,7 +23316,7 @@
       </p:sp>
       <p:sp>
         <p:nvSpPr>
-          <p:cNvPr id="34" name="Shape 32"/>
+          <p:cNvPr id="35" name="Shape 32"/>
           <p:cNvSpPr/>
           <p:nvPr/>
         </p:nvSpPr>
@@ -23213,7 +23343,7 @@
       </p:sp>
       <p:sp>
         <p:nvSpPr>
-          <p:cNvPr id="35" name="Shape 33"/>
+          <p:cNvPr id="36" name="Shape 33"/>
           <p:cNvSpPr/>
           <p:nvPr/>
         </p:nvSpPr>
@@ -23233,7 +23363,7 @@
       </p:sp>
       <p:sp>
         <p:nvSpPr>
-          <p:cNvPr id="36" name="Text 34"/>
+          <p:cNvPr id="37" name="Text 34"/>
           <p:cNvSpPr/>
           <p:nvPr/>
         </p:nvSpPr>
@@ -23272,7 +23402,7 @@
       </p:sp>
       <p:sp>
         <p:nvSpPr>
-          <p:cNvPr id="37" name="Shape 35"/>
+          <p:cNvPr id="38" name="Shape 35"/>
           <p:cNvSpPr/>
           <p:nvPr/>
         </p:nvSpPr>
@@ -23292,7 +23422,7 @@
       </p:sp>
       <p:sp>
         <p:nvSpPr>
-          <p:cNvPr id="38" name="Text 36"/>
+          <p:cNvPr id="39" name="Text 36"/>
           <p:cNvSpPr/>
           <p:nvPr/>
         </p:nvSpPr>
@@ -23331,7 +23461,7 @@
       </p:sp>
       <p:sp>
         <p:nvSpPr>
-          <p:cNvPr id="39" name="Text 37"/>
+          <p:cNvPr id="40" name="Text 37"/>
           <p:cNvSpPr/>
           <p:nvPr/>
         </p:nvSpPr>
@@ -23370,7 +23500,7 @@
       </p:sp>
       <p:sp>
         <p:nvSpPr>
-          <p:cNvPr id="40" name="Text 38"/>
+          <p:cNvPr id="41" name="Text 38"/>
           <p:cNvSpPr/>
           <p:nvPr/>
         </p:nvSpPr>
@@ -23409,7 +23539,7 @@
       </p:sp>
       <p:sp>
         <p:nvSpPr>
-          <p:cNvPr id="41" name="Text 39"/>
+          <p:cNvPr id="42" name="Text 39"/>
           <p:cNvSpPr/>
           <p:nvPr/>
         </p:nvSpPr>
@@ -23448,7 +23578,7 @@
       </p:sp>
       <p:sp>
         <p:nvSpPr>
-          <p:cNvPr id="42" name="Shape 40"/>
+          <p:cNvPr id="43" name="Shape 40"/>
           <p:cNvSpPr/>
           <p:nvPr/>
         </p:nvSpPr>
@@ -23468,7 +23598,7 @@
       </p:sp>
       <p:sp>
         <p:nvSpPr>
-          <p:cNvPr id="43" name="Text 41"/>
+          <p:cNvPr id="44" name="Text 41"/>
           <p:cNvSpPr/>
           <p:nvPr/>
         </p:nvSpPr>
@@ -23507,7 +23637,7 @@
       </p:sp>
       <p:sp>
         <p:nvSpPr>
-          <p:cNvPr id="44" name="Shape 42"/>
+          <p:cNvPr id="45" name="Shape 42"/>
           <p:cNvSpPr/>
           <p:nvPr/>
         </p:nvSpPr>
@@ -23527,7 +23657,7 @@
       </p:sp>
       <p:sp>
         <p:nvSpPr>
-          <p:cNvPr id="45" name="Text 43"/>
+          <p:cNvPr id="46" name="Text 43"/>
           <p:cNvSpPr/>
           <p:nvPr/>
         </p:nvSpPr>
@@ -23566,7 +23696,7 @@
       </p:sp>
       <p:sp>
         <p:nvSpPr>
-          <p:cNvPr id="46" name="Text 44"/>
+          <p:cNvPr id="47" name="Text 44"/>
           <p:cNvSpPr/>
           <p:nvPr/>
         </p:nvSpPr>
@@ -23605,7 +23735,7 @@
       </p:sp>
       <p:sp>
         <p:nvSpPr>
-          <p:cNvPr id="47" name="Text 45"/>
+          <p:cNvPr id="48" name="Text 45"/>
           <p:cNvSpPr/>
           <p:nvPr/>
         </p:nvSpPr>
@@ -23644,7 +23774,7 @@
       </p:sp>
       <p:sp>
         <p:nvSpPr>
-          <p:cNvPr id="48" name="Text 46"/>
+          <p:cNvPr id="49" name="Text 46"/>
           <p:cNvSpPr/>
           <p:nvPr/>
         </p:nvSpPr>
@@ -23683,7 +23813,7 @@
       </p:sp>
       <p:sp>
         <p:nvSpPr>
-          <p:cNvPr id="49" name="Text 47"/>
+          <p:cNvPr id="50" name="Text 47"/>
           <p:cNvSpPr/>
           <p:nvPr/>
         </p:nvSpPr>
@@ -23722,7 +23852,7 @@
       </p:sp>
       <p:sp>
         <p:nvSpPr>
-          <p:cNvPr id="50" name="Text 48"/>
+          <p:cNvPr id="51" name="Text 48"/>
           <p:cNvSpPr/>
           <p:nvPr/>
         </p:nvSpPr>
@@ -23761,7 +23891,7 @@
       </p:sp>
       <p:sp>
         <p:nvSpPr>
-          <p:cNvPr id="51" name="Text 49"/>
+          <p:cNvPr id="52" name="Text 49"/>
           <p:cNvSpPr/>
           <p:nvPr/>
         </p:nvSpPr>
@@ -23850,9 +23980,35 @@
           <a:ln/>
         </p:spPr>
       </p:sp>
-      <p:sp>
-        <p:nvSpPr>
-          <p:cNvPr id="3" name="Text 1"/>
+      <p:pic>
+        <p:nvPicPr>
+          <p:cNvPr id="3" name="Image 0" descr="/Users/stuartkerr/Code/Ask-Ruvnet/Ask-Ruvnet/docs/presentations/images/02-data-sovereignty.png">    </p:cNvPr>
+          <p:cNvPicPr>
+            <a:picLocks noChangeAspect="1"/>
+          </p:cNvPicPr>
+          <p:nvPr/>
+        </p:nvPicPr>
+        <p:blipFill>
+          <a:blip r:embed="rId1">
+            <a:alphaModFix amt="15000"/>
+          </a:blip>
+          <a:stretch>
+            <a:fillRect/>
+          </a:stretch>
+        </p:blipFill>
+        <p:spPr>
+          <a:xfrm>
+            <a:off x="0" y="0"/>
+            <a:ext cx="9144000" cy="5143500"/>
+          </a:xfrm>
+          <a:prstGeom prst="rect">
+            <a:avLst/>
+          </a:prstGeom>
+        </p:spPr>
+      </p:pic>
+      <p:sp>
+        <p:nvSpPr>
+          <p:cNvPr id="4" name="Text 1"/>
           <p:cNvSpPr/>
           <p:nvPr/>
         </p:nvSpPr>
@@ -23891,7 +24047,7 @@
       </p:sp>
       <p:sp>
         <p:nvSpPr>
-          <p:cNvPr id="4" name="Text 2"/>
+          <p:cNvPr id="5" name="Text 2"/>
           <p:cNvSpPr/>
           <p:nvPr/>
         </p:nvSpPr>
@@ -23930,7 +24086,7 @@
       </p:sp>
       <p:sp>
         <p:nvSpPr>
-          <p:cNvPr id="5" name="Text 3"/>
+          <p:cNvPr id="6" name="Text 3"/>
           <p:cNvSpPr/>
           <p:nvPr/>
         </p:nvSpPr>
@@ -23969,7 +24125,7 @@
       </p:sp>
       <p:sp>
         <p:nvSpPr>
-          <p:cNvPr id="6" name="Shape 4"/>
+          <p:cNvPr id="7" name="Shape 4"/>
           <p:cNvSpPr/>
           <p:nvPr/>
         </p:nvSpPr>
@@ -23996,7 +24152,7 @@
       </p:sp>
       <p:sp>
         <p:nvSpPr>
-          <p:cNvPr id="7" name="Shape 5"/>
+          <p:cNvPr id="8" name="Shape 5"/>
           <p:cNvSpPr/>
           <p:nvPr/>
         </p:nvSpPr>
@@ -24016,7 +24172,7 @@
       </p:sp>
       <p:sp>
         <p:nvSpPr>
-          <p:cNvPr id="8" name="Text 6"/>
+          <p:cNvPr id="9" name="Text 6"/>
           <p:cNvSpPr/>
           <p:nvPr/>
         </p:nvSpPr>
@@ -24055,7 +24211,7 @@
       </p:sp>
       <p:sp>
         <p:nvSpPr>
-          <p:cNvPr id="9" name="Text 7"/>
+          <p:cNvPr id="10" name="Text 7"/>
           <p:cNvSpPr/>
           <p:nvPr/>
         </p:nvSpPr>
@@ -24094,7 +24250,7 @@
       </p:sp>
       <p:sp>
         <p:nvSpPr>
-          <p:cNvPr id="10" name="Text 8"/>
+          <p:cNvPr id="11" name="Text 8"/>
           <p:cNvSpPr/>
           <p:nvPr/>
         </p:nvSpPr>
@@ -24200,7 +24356,7 @@
       </p:sp>
       <p:sp>
         <p:nvSpPr>
-          <p:cNvPr id="11" name="Shape 9"/>
+          <p:cNvPr id="12" name="Shape 9"/>
           <p:cNvSpPr/>
           <p:nvPr/>
         </p:nvSpPr>
@@ -24227,7 +24383,7 @@
       </p:sp>
       <p:sp>
         <p:nvSpPr>
-          <p:cNvPr id="12" name="Shape 10"/>
+          <p:cNvPr id="13" name="Shape 10"/>
           <p:cNvSpPr/>
           <p:nvPr/>
         </p:nvSpPr>
@@ -24247,7 +24403,7 @@
       </p:sp>
       <p:sp>
         <p:nvSpPr>
-          <p:cNvPr id="13" name="Text 11"/>
+          <p:cNvPr id="14" name="Text 11"/>
           <p:cNvSpPr/>
           <p:nvPr/>
         </p:nvSpPr>
@@ -24286,7 +24442,7 @@
       </p:sp>
       <p:sp>
         <p:nvSpPr>
-          <p:cNvPr id="14" name="Text 12"/>
+          <p:cNvPr id="15" name="Text 12"/>
           <p:cNvSpPr/>
           <p:nvPr/>
         </p:nvSpPr>
@@ -24325,7 +24481,7 @@
       </p:sp>
       <p:sp>
         <p:nvSpPr>
-          <p:cNvPr id="15" name="Text 13"/>
+          <p:cNvPr id="16" name="Text 13"/>
           <p:cNvSpPr/>
           <p:nvPr/>
         </p:nvSpPr>
@@ -24431,7 +24587,7 @@
       </p:sp>
       <p:sp>
         <p:nvSpPr>
-          <p:cNvPr id="16" name="Shape 14"/>
+          <p:cNvPr id="17" name="Shape 14"/>
           <p:cNvSpPr/>
           <p:nvPr/>
         </p:nvSpPr>
@@ -24451,7 +24607,7 @@
       </p:sp>
       <p:sp>
         <p:nvSpPr>
-          <p:cNvPr id="17" name="Text 15"/>
+          <p:cNvPr id="18" name="Text 15"/>
           <p:cNvSpPr/>
           <p:nvPr/>
         </p:nvSpPr>
@@ -24490,7 +24646,7 @@
       </p:sp>
       <p:sp>
         <p:nvSpPr>
-          <p:cNvPr id="18" name="Text 16"/>
+          <p:cNvPr id="19" name="Text 16"/>
           <p:cNvSpPr/>
           <p:nvPr/>
         </p:nvSpPr>
